--- a/docs/Cafe.pi설명서.pptx
+++ b/docs/Cafe.pi설명서.pptx
@@ -1844,7 +1844,7 @@
                 <a:ea typeface="Malgun Gothic" pitchFamily="34" charset="-122"/>
                 <a:cs typeface="Malgun Gothic" pitchFamily="34" charset="-120"/>
               </a:rPr>
-              <a:t>      18개 Phase 구현 완료 · 203개 locale 글로벌 배포</a:t>
+              <a:t>      19개 Phase 구현 완료 · 203개 locale 글로벌 배포</a:t>
             </a:r>
             <a:endParaRPr lang="en-US" sz="1250" dirty="0"/>
           </a:p>
@@ -2049,7 +2049,7 @@
                 <a:ea typeface="Malgun Gothic" pitchFamily="34" charset="-122"/>
                 <a:cs typeface="Malgun Gothic" pitchFamily="34" charset="-120"/>
               </a:rPr>
-              <a:t>Pi Browser의 쿠키 미저장·결제 트랩·다국어 배포 같은 함정을 이미 통과한 18개 Phase의 코드가 그대로 출발점이 됩니다. 새 Pi 앱은 0에서가 아니라, 실증된 아키텍처에서 시작합니다.</a:t>
+              <a:t>Pi Browser의 쿠키 미저장·결제 트랩·다국어 배포 같은 함정을 이미 통과한 19개 Phase의 코드가 그대로 출발점이 됩니다. 새 Pi 앱은 0에서가 아니라, 실증된 아키텍처에서 시작합니다.</a:t>
             </a:r>
             <a:endParaRPr lang="en-US" sz="1500" dirty="0"/>
           </a:p>
@@ -2249,7 +2249,7 @@
                 <a:ea typeface="Malgun Gothic" pitchFamily="34" charset="-122"/>
                 <a:cs typeface="Malgun Gothic" pitchFamily="34" charset="-120"/>
               </a:rPr>
-              <a:t>22</a:t>
+              <a:t>19</a:t>
             </a:r>
             <a:r>
               <a:rPr lang="en-US" sz="1600" b="1" dirty="0">
